--- a/dist/초2/과학/탐구의기초/초2_과학_탐구의기초_01_예상과관찰.pptx
+++ b/dist/초2/과학/탐구의기초/초2_과학_탐구의기초_01_예상과관찰.pptx
@@ -119,20 +119,20 @@
   <p:extLst>
     <p:ext uri="{521415D9-36F7-43E2-AB2F-B90AF26B5E84}">
       <p14:sectionLst xmlns:p14="http://schemas.microsoft.com/office/powerpoint/2010/main">
-        <p14:section name="도입" id="{661930ff-cb60-0571-7e78-7583e96d8577}">
+        <p14:section name="도입" id="{469d6bb3-9772-b12b-01d5-6ad6c7bb3a96}">
           <p14:sldIdLst>
             <p14:sldId id="256"/>
             <p14:sldId id="257"/>
           </p14:sldIdLst>
         </p14:section>
-        <p14:section name="개념" id="{901b6a76-368e-a56a-70d8-00c9908de41b}">
+        <p14:section name="개념" id="{435062e7-b5eb-fa48-afee-0e247629d31c}">
           <p14:sldIdLst>
             <p14:sldId id="258"/>
             <p14:sldId id="259"/>
             <p14:sldId id="261"/>
           </p14:sldIdLst>
         </p14:section>
-        <p14:section name="연습" id="{ac39269b-33f6-3e80-3d62-118886f4062b}">
+        <p14:section name="연습" id="{9ceb8339-8be3-7324-e2f5-e36b411ccb2d}">
           <p14:sldIdLst>
             <p14:sldId id="260"/>
             <p14:sldId id="262"/>
@@ -140,24 +140,24 @@
             <p14:sldId id="264"/>
           </p14:sldIdLst>
         </p14:section>
-        <p14:section name="개념" id="{f35cf9bf-36c8-f1d6-41d1-fce0fce1d573}">
+        <p14:section name="개념" id="{afbffa88-c5b9-8d2d-47d5-fbfbdfc4ebc4}">
           <p14:sldIdLst/>
         </p14:section>
-        <p14:section name="연습" id="{ecec81f5-b66a-271d-78df-e0bb5dd5213e}">
+        <p14:section name="연습" id="{18ed6af5-0f2d-60cf-bd14-a67084819f67}">
           <p14:sldIdLst/>
         </p14:section>
-        <p14:section name="확인" id="{e12487f6-d362-9dfc-4528-6bfdaf0d3278}">
+        <p14:section name="확인" id="{19e070d1-f93e-4717-98d4-e07c62695763}">
           <p14:sldIdLst>
             <p14:sldId id="265"/>
             <p14:sldId id="266"/>
           </p14:sldIdLst>
         </p14:section>
-        <p14:section name="정리" id="{7c8a898a-1b0a-918c-3000-98c24013b04e}">
+        <p14:section name="정리" id="{e6250f1d-4588-8234-0c9b-64b786e822dd}">
           <p14:sldIdLst>
             <p14:sldId id="267"/>
           </p14:sldIdLst>
         </p14:section>
-        <p14:section name="보충" id="{287f051c-0b34-42ef-b356-78ef0fa4c1b4}">
+        <p14:section name="보충" id="{4f3fdda8-0f95-9559-11cb-2d563932ac04}">
           <p14:sldIdLst>
             <p14:sldId id="268"/>
           </p14:sldIdLst>
